--- a/06-final-report/figures/fig-7-mlfq-vs-fcfs.pptx
+++ b/06-final-report/figures/fig-7-mlfq-vs-fcfs.pptx
@@ -1238,7 +1238,7 @@
                 <a:ea typeface="맑은 고딕" pitchFamily="34" charset="-122"/>
                 <a:cs typeface="맑은 고딕" pitchFamily="34" charset="-120"/>
               </a:rPr>
-              <a:t>그림 7. MLFQ 선점형 vs FCFS — 요청 유형별 대기시간</a:t>
+              <a:t>그림 7. MLFQ 선점형 vs FCFS — 요청 유형별 응답시간</a:t>
             </a:r>
             <a:endParaRPr lang="en-US" sz="1400" dirty="0"/>
           </a:p>

--- a/06-final-report/figures/fig-7-mlfq-vs-fcfs.pptx
+++ b/06-final-report/figures/fig-7-mlfq-vs-fcfs.pptx
@@ -1277,7 +1277,7 @@
                 <a:ea typeface="맑은 고딕" pitchFamily="34" charset="-122"/>
                 <a:cs typeface="맑은 고딕" pitchFamily="34" charset="-120"/>
               </a:rPr>
-              <a:t>5회 반복 (다중 시드) | 버스트 패턴 | 단위: 초(s)</a:t>
+              <a:t>5시드 평균 | 버스트 패턴 | 단위: 초(s)</a:t>
             </a:r>
             <a:endParaRPr lang="en-US" sz="900" dirty="0"/>
           </a:p>
